--- a/11а клас/РС/7. Свързване на приложения с бази от данни/09. CRUD приложение с ORM.pptx
+++ b/11а клас/РС/7. Свързване на приложения с бази от данни/09. CRUD приложение с ORM.pptx
@@ -24,6 +24,8 @@
     <p:sldId id="645" r:id="rId15"/>
     <p:sldId id="646" r:id="rId16"/>
     <p:sldId id="572" r:id="rId17"/>
+    <p:sldId id="651" r:id="rId25"/>
+    <p:sldId id="652" r:id="rId26"/>
   </p:sldIdLst>
   <p:sldSz cx="12192000" cy="6858000"/>
   <p:notesSz cx="6858000" cy="9144000"/>
@@ -1194,7 +1196,9 @@
           <a:bodyPr/>
           <a:lstStyle/>
           <a:p>
-            <a:endParaRPr lang="en-US" dirty="0"/>
+            <a:r>
+              <a:t>EFC: по-малко код, IntelliSense, миграции, авто защита.</a:t>
+            </a:r>
           </a:p>
         </p:txBody>
       </p:sp>
@@ -1303,6 +1307,356 @@
         <p14:creationId xmlns:p14="http://schemas.microsoft.com/office/powerpoint/2010/main" val="708677331"/>
       </p:ext>
     </p:extLst>
+  </p:cSld>
+  <p:clrMapOvr>
+    <a:masterClrMapping/>
+  </p:clrMapOvr>
+</p:notes>
+</file>
+
+<file path=ppt/notesSlides/notesSlide10.xml><?xml version="1.0" encoding="utf-8"?>
+<p:notes xmlns:a="http://schemas.openxmlformats.org/drawingml/2006/main" xmlns:p="http://schemas.openxmlformats.org/presentationml/2006/main" xmlns:r="http://schemas.openxmlformats.org/officeDocument/2006/relationships">
+  <p:cSld>
+    <p:spTree>
+      <p:nvGrpSpPr>
+        <p:cNvPr id="1" name=""/>
+        <p:cNvGrpSpPr/>
+        <p:nvPr/>
+      </p:nvGrpSpPr>
+      <p:grpSpPr>
+        <a:xfrm>
+          <a:off x="0" y="0"/>
+          <a:ext cx="0" cy="0"/>
+          <a:chOff x="0" y="0"/>
+          <a:chExt cx="0" cy="0"/>
+        </a:xfrm>
+      </p:grpSpPr>
+      <p:sp>
+        <p:nvSpPr>
+          <p:cNvPr id="2" name="Slide Image Placeholder 1"/>
+          <p:cNvSpPr>
+            <a:spLocks noGrp="1"/>
+          </p:cNvSpPr>
+          <p:nvPr>
+            <p:ph type="sldImg" idx="2"/>
+          </p:nvPr>
+        </p:nvSpPr>
+        <p:spPr/>
+      </p:sp>
+      <p:sp>
+        <p:nvSpPr>
+          <p:cNvPr id="3" name="Notes Placeholder 2"/>
+          <p:cNvSpPr>
+            <a:spLocks noGrp="1"/>
+          </p:cNvSpPr>
+          <p:nvPr>
+            <p:ph type="body" idx="3" sz="quarter"/>
+          </p:nvPr>
+        </p:nvSpPr>
+        <p:spPr/>
+        <p:txBody>
+          <a:bodyPr/>
+          <a:lstStyle/>
+          <a:p>
+            <a:r>
+              <a:t>Същото приложение като 08, но с Entity Framework.</a:t>
+            </a:r>
+          </a:p>
+        </p:txBody>
+      </p:sp>
+      <p:sp>
+        <p:nvSpPr>
+          <p:cNvPr id="4" name="Slide Number Placeholder 3"/>
+          <p:cNvSpPr>
+            <a:spLocks noGrp="1"/>
+          </p:cNvSpPr>
+          <p:nvPr>
+            <p:ph type="sldNum" idx="5" sz="quarter"/>
+          </p:nvPr>
+        </p:nvSpPr>
+        <p:spPr/>
+      </p:sp>
+    </p:spTree>
+  </p:cSld>
+  <p:clrMapOvr>
+    <a:masterClrMapping/>
+  </p:clrMapOvr>
+</p:notes>
+</file>
+
+<file path=ppt/notesSlides/notesSlide11.xml><?xml version="1.0" encoding="utf-8"?>
+<p:notes xmlns:a="http://schemas.openxmlformats.org/drawingml/2006/main" xmlns:p="http://schemas.openxmlformats.org/presentationml/2006/main" xmlns:r="http://schemas.openxmlformats.org/officeDocument/2006/relationships">
+  <p:cSld>
+    <p:spTree>
+      <p:nvGrpSpPr>
+        <p:cNvPr id="1" name=""/>
+        <p:cNvGrpSpPr/>
+        <p:nvPr/>
+      </p:nvGrpSpPr>
+      <p:grpSpPr>
+        <a:xfrm>
+          <a:off x="0" y="0"/>
+          <a:ext cx="0" cy="0"/>
+          <a:chOff x="0" y="0"/>
+          <a:chExt cx="0" cy="0"/>
+        </a:xfrm>
+      </p:grpSpPr>
+      <p:sp>
+        <p:nvSpPr>
+          <p:cNvPr id="2" name="Slide Image Placeholder 1"/>
+          <p:cNvSpPr>
+            <a:spLocks noGrp="1"/>
+          </p:cNvSpPr>
+          <p:nvPr>
+            <p:ph type="sldImg" idx="2"/>
+          </p:nvPr>
+        </p:nvSpPr>
+        <p:spPr/>
+      </p:sp>
+      <p:sp>
+        <p:nvSpPr>
+          <p:cNvPr id="3" name="Notes Placeholder 2"/>
+          <p:cNvSpPr>
+            <a:spLocks noGrp="1"/>
+          </p:cNvSpPr>
+          <p:nvPr>
+            <p:ph type="body" idx="3" sz="quarter"/>
+          </p:nvPr>
+        </p:nvSpPr>
+        <p:spPr/>
+        <p:txBody>
+          <a:bodyPr/>
+          <a:lstStyle/>
+          <a:p>
+            <a:r>
+              <a:t>СРАВНЕНИЕ в края - колко по-малко код?</a:t>
+            </a:r>
+          </a:p>
+        </p:txBody>
+      </p:sp>
+      <p:sp>
+        <p:nvSpPr>
+          <p:cNvPr id="4" name="Slide Number Placeholder 3"/>
+          <p:cNvSpPr>
+            <a:spLocks noGrp="1"/>
+          </p:cNvSpPr>
+          <p:nvPr>
+            <p:ph type="sldNum" idx="5" sz="quarter"/>
+          </p:nvPr>
+        </p:nvSpPr>
+        <p:spPr/>
+      </p:sp>
+    </p:spTree>
+  </p:cSld>
+  <p:clrMapOvr>
+    <a:masterClrMapping/>
+  </p:clrMapOvr>
+</p:notes>
+</file>
+
+<file path=ppt/notesSlides/notesSlide12.xml><?xml version="1.0" encoding="utf-8"?>
+<p:notes xmlns:a="http://schemas.openxmlformats.org/drawingml/2006/main" xmlns:p="http://schemas.openxmlformats.org/presentationml/2006/main" xmlns:r="http://schemas.openxmlformats.org/officeDocument/2006/relationships">
+  <p:cSld>
+    <p:spTree>
+      <p:nvGrpSpPr>
+        <p:cNvPr id="1" name=""/>
+        <p:cNvGrpSpPr/>
+        <p:nvPr/>
+      </p:nvGrpSpPr>
+      <p:grpSpPr>
+        <a:xfrm>
+          <a:off x="0" y="0"/>
+          <a:ext cx="0" cy="0"/>
+          <a:chOff x="0" y="0"/>
+          <a:chExt cx="0" cy="0"/>
+        </a:xfrm>
+      </p:grpSpPr>
+      <p:sp>
+        <p:nvSpPr>
+          <p:cNvPr id="2" name="Slide Image Placeholder 1"/>
+          <p:cNvSpPr>
+            <a:spLocks noGrp="1"/>
+          </p:cNvSpPr>
+          <p:nvPr>
+            <p:ph type="sldImg" idx="2"/>
+          </p:nvPr>
+        </p:nvSpPr>
+        <p:spPr/>
+      </p:sp>
+      <p:sp>
+        <p:nvSpPr>
+          <p:cNvPr id="3" name="Notes Placeholder 2"/>
+          <p:cNvSpPr>
+            <a:spLocks noGrp="1"/>
+          </p:cNvSpPr>
+          <p:nvPr>
+            <p:ph type="body" idx="3" sz="quarter"/>
+          </p:nvPr>
+        </p:nvSpPr>
+        <p:spPr/>
+        <p:txBody>
+          <a:bodyPr/>
+          <a:lstStyle/>
+          <a:p>
+            <a:r>
+              <a:t>Display.cs е ИДЕНТИЧЕН с 08. Това доказва силата на 3-слойната архитектура.</a:t>
+            </a:r>
+          </a:p>
+        </p:txBody>
+      </p:sp>
+      <p:sp>
+        <p:nvSpPr>
+          <p:cNvPr id="4" name="Slide Number Placeholder 3"/>
+          <p:cNvSpPr>
+            <a:spLocks noGrp="1"/>
+          </p:cNvSpPr>
+          <p:nvPr>
+            <p:ph type="sldNum" idx="5" sz="quarter"/>
+          </p:nvPr>
+        </p:nvSpPr>
+        <p:spPr/>
+      </p:sp>
+    </p:spTree>
+  </p:cSld>
+  <p:clrMapOvr>
+    <a:masterClrMapping/>
+  </p:clrMapOvr>
+</p:notes>
+</file>
+
+<file path=ppt/notesSlides/notesSlide13.xml><?xml version="1.0" encoding="utf-8"?>
+<p:notes xmlns:a="http://schemas.openxmlformats.org/drawingml/2006/main" xmlns:p="http://schemas.openxmlformats.org/presentationml/2006/main" xmlns:r="http://schemas.openxmlformats.org/officeDocument/2006/relationships">
+  <p:cSld>
+    <p:spTree>
+      <p:nvGrpSpPr>
+        <p:cNvPr id="1" name=""/>
+        <p:cNvGrpSpPr/>
+        <p:nvPr/>
+      </p:nvGrpSpPr>
+      <p:grpSpPr>
+        <a:xfrm>
+          <a:off x="0" y="0"/>
+          <a:ext cx="0" cy="0"/>
+          <a:chOff x="0" y="0"/>
+          <a:chExt cx="0" cy="0"/>
+        </a:xfrm>
+      </p:grpSpPr>
+      <p:sp>
+        <p:nvSpPr>
+          <p:cNvPr id="2" name="Slide Image Placeholder 1"/>
+          <p:cNvSpPr>
+            <a:spLocks noGrp="1"/>
+          </p:cNvSpPr>
+          <p:nvPr>
+            <p:ph type="sldImg" idx="2"/>
+          </p:nvPr>
+        </p:nvSpPr>
+        <p:spPr/>
+      </p:sp>
+      <p:sp>
+        <p:nvSpPr>
+          <p:cNvPr id="3" name="Notes Placeholder 2"/>
+          <p:cNvSpPr>
+            <a:spLocks noGrp="1"/>
+          </p:cNvSpPr>
+          <p:nvPr>
+            <p:ph type="body" idx="3" sz="quarter"/>
+          </p:nvPr>
+        </p:nvSpPr>
+        <p:spPr/>
+        <p:txBody>
+          <a:bodyPr/>
+          <a:lstStyle/>
+          <a:p>
+            <a:r>
+              <a:t>Покажете двата файла един до друг на проектора.</a:t>
+            </a:r>
+          </a:p>
+        </p:txBody>
+      </p:sp>
+      <p:sp>
+        <p:nvSpPr>
+          <p:cNvPr id="4" name="Slide Number Placeholder 3"/>
+          <p:cNvSpPr>
+            <a:spLocks noGrp="1"/>
+          </p:cNvSpPr>
+          <p:nvPr>
+            <p:ph type="sldNum" idx="5" sz="quarter"/>
+          </p:nvPr>
+        </p:nvSpPr>
+        <p:spPr/>
+      </p:sp>
+    </p:spTree>
+  </p:cSld>
+  <p:clrMapOvr>
+    <a:masterClrMapping/>
+  </p:clrMapOvr>
+</p:notes>
+</file>
+
+<file path=ppt/notesSlides/notesSlide14.xml><?xml version="1.0" encoding="utf-8"?>
+<p:notes xmlns:a="http://schemas.openxmlformats.org/drawingml/2006/main" xmlns:p="http://schemas.openxmlformats.org/presentationml/2006/main" xmlns:r="http://schemas.openxmlformats.org/officeDocument/2006/relationships">
+  <p:cSld>
+    <p:spTree>
+      <p:nvGrpSpPr>
+        <p:cNvPr id="1" name=""/>
+        <p:cNvGrpSpPr/>
+        <p:nvPr/>
+      </p:nvGrpSpPr>
+      <p:grpSpPr>
+        <a:xfrm>
+          <a:off x="0" y="0"/>
+          <a:ext cx="0" cy="0"/>
+          <a:chOff x="0" y="0"/>
+          <a:chExt cx="0" cy="0"/>
+        </a:xfrm>
+      </p:grpSpPr>
+      <p:sp>
+        <p:nvSpPr>
+          <p:cNvPr id="2" name="Slide Image Placeholder 1"/>
+          <p:cNvSpPr>
+            <a:spLocks noGrp="1"/>
+          </p:cNvSpPr>
+          <p:nvPr>
+            <p:ph type="sldImg" idx="2"/>
+          </p:nvPr>
+        </p:nvSpPr>
+        <p:spPr/>
+      </p:sp>
+      <p:sp>
+        <p:nvSpPr>
+          <p:cNvPr id="3" name="Notes Placeholder 2"/>
+          <p:cNvSpPr>
+            <a:spLocks noGrp="1"/>
+          </p:cNvSpPr>
+          <p:nvPr>
+            <p:ph type="body" idx="3" sz="quarter"/>
+          </p:nvPr>
+        </p:nvSpPr>
+        <p:spPr/>
+        <p:txBody>
+          <a:bodyPr/>
+          <a:lstStyle/>
+          <a:p>
+            <a:r>
+              <a:t>Демо: изтрийте БД в SSMS, стартирайте, покажете автоматичното създаване.</a:t>
+            </a:r>
+          </a:p>
+        </p:txBody>
+      </p:sp>
+      <p:sp>
+        <p:nvSpPr>
+          <p:cNvPr id="4" name="Slide Number Placeholder 3"/>
+          <p:cNvSpPr>
+            <a:spLocks noGrp="1"/>
+          </p:cNvSpPr>
+          <p:nvPr>
+            <p:ph type="sldNum" idx="5" sz="quarter"/>
+          </p:nvPr>
+        </p:nvSpPr>
+        <p:spPr/>
+      </p:sp>
+    </p:spTree>
   </p:cSld>
   <p:clrMapOvr>
     <a:masterClrMapping/>
@@ -1354,7 +1708,9 @@
           <a:bodyPr/>
           <a:lstStyle/>
           <a:p>
-            <a:endParaRPr lang="en-US" dirty="0"/>
+            <a:r>
+              <a:t>Архитектурата е ИДЕНТИЧНА! Само Data слоят е различен.</a:t>
+            </a:r>
           </a:p>
         </p:txBody>
       </p:sp>
@@ -1514,7 +1870,9 @@
           <a:bodyPr/>
           <a:lstStyle/>
           <a:p>
-            <a:endParaRPr lang="en-US" dirty="0"/>
+            <a:r>
+              <a:t>ProductContext замества Database.cs + ProductData.cs.</a:t>
+            </a:r>
           </a:p>
         </p:txBody>
       </p:sp>
@@ -1674,7 +2032,9 @@
           <a:bodyPr/>
           <a:lstStyle/>
           <a:p>
-            <a:endParaRPr lang="en-US" dirty="0"/>
+            <a:r>
+              <a:t>Десен бутон върху References → Manage NuGet Packages → EntityFramework.</a:t>
+            </a:r>
           </a:p>
         </p:txBody>
       </p:sp>
@@ -1834,7 +2194,9 @@
           <a:bodyPr/>
           <a:lstStyle/>
           <a:p>
-            <a:endParaRPr lang="en-US" dirty="0"/>
+            <a:r>
+              <a:t>Десен бутон → Browse → EntityFramework 6.x → Install.</a:t>
+            </a:r>
           </a:p>
         </p:txBody>
       </p:sp>
@@ -1994,7 +2356,9 @@
           <a:bodyPr/>
           <a:lstStyle/>
           <a:p>
-            <a:endParaRPr lang="en-US" dirty="0"/>
+            <a:r>
+              <a:t>Code-First: Класът Product -&gt; EFC създава таблицата.</a:t>
+            </a:r>
           </a:p>
         </p:txBody>
       </p:sp>
@@ -2154,7 +2518,9 @@
           <a:bodyPr/>
           <a:lstStyle/>
           <a:p>
-            <a:endParaRPr lang="en-US" dirty="0"/>
+            <a:r>
+              <a:t>Id → PK. Name, Price, Stock → съответни SQL типове.</a:t>
+            </a:r>
           </a:p>
         </p:txBody>
       </p:sp>
@@ -2314,7 +2680,9 @@
           <a:bodyPr/>
           <a:lstStyle/>
           <a:p>
-            <a:endParaRPr lang="en-US" dirty="0"/>
+            <a:r>
+              <a:t>base('name=ProductContext') − търси в App.config. Ако БД не съществува - автоматично се създава!</a:t>
+            </a:r>
           </a:p>
         </p:txBody>
       </p:sp>
@@ -2474,7 +2842,9 @@
           <a:bodyPr/>
           <a:lstStyle/>
           <a:p>
-            <a:endParaRPr lang="en-US" dirty="0"/>
+            <a:r>
+              <a:t>context.Products.ToList() = SELECT * FROM Products. Без ред SQL код!</a:t>
+            </a:r>
           </a:p>
         </p:txBody>
       </p:sp>
@@ -8350,6 +8720,186 @@
         <p14:creationId xmlns:p14="http://schemas.microsoft.com/office/powerpoint/2010/main" val="1241344677"/>
       </p:ext>
     </p:extLst>
+  </p:cSld>
+  <p:clrMapOvr>
+    <a:masterClrMapping/>
+  </p:clrMapOvr>
+</p:sld>
+</file>
+
+<file path=ppt/slides/slide17.xml><?xml version="1.0" encoding="utf-8"?>
+<p:sld xmlns:a="http://schemas.openxmlformats.org/drawingml/2006/main" xmlns:p="http://schemas.openxmlformats.org/presentationml/2006/main" xmlns:r="http://schemas.openxmlformats.org/officeDocument/2006/relationships">
+  <p:cSld>
+    <p:spTree>
+      <p:nvGrpSpPr>
+        <p:cNvPr id="1" name=""/>
+        <p:cNvGrpSpPr/>
+        <p:nvPr/>
+      </p:nvGrpSpPr>
+      <p:grpSpPr/>
+      <p:sp>
+        <p:nvSpPr>
+          <p:cNvPr id="2" name="Title 1"/>
+          <p:cNvSpPr>
+            <a:spLocks noGrp="1"/>
+          </p:cNvSpPr>
+          <p:nvPr>
+            <p:ph type="title"/>
+          </p:nvPr>
+        </p:nvSpPr>
+        <p:spPr/>
+        <p:txBody>
+          <a:bodyPr/>
+          <a:lstStyle/>
+          <a:p>
+            <a:r>
+              <a:t>Сравнение: ADO.NET (08) vs EFC (09)</a:t>
+            </a:r>
+          </a:p>
+        </p:txBody>
+      </p:sp>
+      <p:sp>
+        <p:nvSpPr>
+          <p:cNvPr id="3" name="Content Placeholder 2"/>
+          <p:cNvSpPr>
+            <a:spLocks noGrp="1"/>
+          </p:cNvSpPr>
+          <p:nvPr>
+            <p:ph idx="1"/>
+          </p:nvPr>
+        </p:nvSpPr>
+        <p:spPr/>
+        <p:txBody>
+          <a:bodyPr/>
+          <a:lstStyle/>
+          <a:p>
+            <a:r>
+              <a:t>ProductData.cs (ADO.NET): ~120 реда SQL код</a:t>
+            </a:r>
+          </a:p>
+          <a:p>
+            <a:r>
+              <a:t>ProductContext.cs (EFC): ~10 реда, без SQL</a:t>
+            </a:r>
+          </a:p>
+          <a:p>
+            <a:r>
+              <a:t>GetAll() ADO.NET: 15 реда</a:t>
+            </a:r>
+          </a:p>
+          <a:p>
+            <a:r>
+              <a:t>GetAll() EFC: 1 ред: context.Products.ToList()</a:t>
+            </a:r>
+          </a:p>
+          <a:p>
+            <a:r>
+              <a:t>Get(id) ADO.NET: 15 реда</a:t>
+            </a:r>
+          </a:p>
+          <a:p>
+            <a:r>
+              <a:t>Get(id) EFC: 1 ред: context.Products.Find(id)</a:t>
+            </a:r>
+          </a:p>
+          <a:p>
+            <a:r>
+              <a:t>Цена: малко по-бавна производителност</a:t>
+            </a:r>
+          </a:p>
+        </p:txBody>
+      </p:sp>
+    </p:spTree>
+  </p:cSld>
+  <p:clrMapOvr>
+    <a:masterClrMapping/>
+  </p:clrMapOvr>
+</p:sld>
+</file>
+
+<file path=ppt/slides/slide18.xml><?xml version="1.0" encoding="utf-8"?>
+<p:sld xmlns:a="http://schemas.openxmlformats.org/drawingml/2006/main" xmlns:p="http://schemas.openxmlformats.org/presentationml/2006/main" xmlns:r="http://schemas.openxmlformats.org/officeDocument/2006/relationships">
+  <p:cSld>
+    <p:spTree>
+      <p:nvGrpSpPr>
+        <p:cNvPr id="1" name=""/>
+        <p:cNvGrpSpPr/>
+        <p:nvPr/>
+      </p:nvGrpSpPr>
+      <p:grpSpPr/>
+      <p:sp>
+        <p:nvSpPr>
+          <p:cNvPr id="2" name="Title 1"/>
+          <p:cNvSpPr>
+            <a:spLocks noGrp="1"/>
+          </p:cNvSpPr>
+          <p:nvPr>
+            <p:ph type="title"/>
+          </p:nvPr>
+        </p:nvSpPr>
+        <p:spPr/>
+        <p:txBody>
+          <a:bodyPr/>
+          <a:lstStyle/>
+          <a:p>
+            <a:r>
+              <a:t>Code-First — Как EFC създава БД?</a:t>
+            </a:r>
+          </a:p>
+        </p:txBody>
+      </p:sp>
+      <p:sp>
+        <p:nvSpPr>
+          <p:cNvPr id="3" name="Content Placeholder 2"/>
+          <p:cNvSpPr>
+            <a:spLocks noGrp="1"/>
+          </p:cNvSpPr>
+          <p:nvPr>
+            <p:ph idx="1"/>
+          </p:nvPr>
+        </p:nvSpPr>
+        <p:spPr/>
+        <p:txBody>
+          <a:bodyPr/>
+          <a:lstStyle/>
+          <a:p>
+            <a:r>
+              <a:t>1. Дефинираме C# класове</a:t>
+            </a:r>
+          </a:p>
+          <a:p>
+            <a:r>
+              <a:t>2. Създаваме DbContext с DbSet свойства</a:t>
+            </a:r>
+          </a:p>
+          <a:p>
+            <a:r>
+              <a:t>3. Добавяме connection string в App.config</a:t>
+            </a:r>
+          </a:p>
+          <a:p>
+            <a:r>
+              <a:t>4. Стартираме -&gt; EFC: Съществува ли БД?</a:t>
+            </a:r>
+          </a:p>
+          <a:p>
+            <a:r>
+              <a:t>5. Ако НЕ: CREATE DATABASE ProductDb + CREATE TABLE Products</a:t>
+            </a:r>
+          </a:p>
+          <a:p>
+            <a:r>
+              <a:t>6. EFC генерира DDL автоматично!</a:t>
+            </a:r>
+          </a:p>
+          <a:p>
+            <a:r>
+              <a:t>ДЕМО: Изтрийте БД, стартирайте приложението</a:t>
+            </a:r>
+          </a:p>
+        </p:txBody>
+      </p:sp>
+    </p:spTree>
   </p:cSld>
   <p:clrMapOvr>
     <a:masterClrMapping/>
